--- a/EventRadar_VPBoys_Presentation.pptx
+++ b/EventRadar_VPBoys_Presentation.pptx
@@ -3711,7 +3711,7 @@
             </a:r>
             <a:br/>
             <a:r>
-              <a:t>github.com/Shivanand-Varpe/GeoGuild</a:t>
+              <a:t>github.com/Shivanand-Varpe/VP-Boys_ShivanandVarpe</a:t>
             </a:r>
           </a:p>
         </p:txBody>
